--- a/readout/Analyst_Take_Home_Readout.pptx
+++ b/readout/Analyst_Take_Home_Readout.pptx
@@ -3441,6 +3441,10 @@
             <a:prstDash val="solid"/>
           </a:ln>
         </p:spPr>
+        <p:txBody>
+          <a:bodyPr/>
+          <a:p/>
+        </p:txBody>
       </p:sp>
       <p:sp>
         <p:nvSpPr>
@@ -3671,6 +3675,10 @@
             <a:prstDash val="solid"/>
           </a:ln>
         </p:spPr>
+        <p:txBody>
+          <a:bodyPr/>
+          <a:p/>
+        </p:txBody>
       </p:sp>
       <p:sp>
         <p:nvSpPr>
@@ -3821,6 +3829,10 @@
             <a:prstDash val="solid"/>
           </a:ln>
         </p:spPr>
+        <p:txBody>
+          <a:bodyPr/>
+          <a:p/>
+        </p:txBody>
       </p:sp>
       <p:sp>
         <p:nvSpPr>
@@ -3924,6 +3936,10 @@
             <a:prstDash val="solid"/>
           </a:ln>
         </p:spPr>
+        <p:txBody>
+          <a:bodyPr/>
+          <a:p/>
+        </p:txBody>
       </p:sp>
       <p:sp>
         <p:nvSpPr>
@@ -3949,6 +3965,10 @@
             <a:prstDash val="solid"/>
           </a:ln>
         </p:spPr>
+        <p:txBody>
+          <a:bodyPr/>
+          <a:p/>
+        </p:txBody>
       </p:sp>
       <p:sp>
         <p:nvSpPr>
@@ -4164,6 +4184,10 @@
             <a:prstDash val="solid"/>
           </a:ln>
         </p:spPr>
+        <p:txBody>
+          <a:bodyPr/>
+          <a:p/>
+        </p:txBody>
       </p:sp>
       <p:sp>
         <p:nvSpPr>
@@ -4189,6 +4213,10 @@
             <a:prstDash val="solid"/>
           </a:ln>
         </p:spPr>
+        <p:txBody>
+          <a:bodyPr/>
+          <a:p/>
+        </p:txBody>
       </p:sp>
       <p:sp>
         <p:nvSpPr>
@@ -4214,6 +4242,10 @@
             <a:prstDash val="solid"/>
           </a:ln>
         </p:spPr>
+        <p:txBody>
+          <a:bodyPr/>
+          <a:p/>
+        </p:txBody>
       </p:sp>
       <p:sp>
         <p:nvSpPr>
@@ -4446,6 +4478,10 @@
             <a:prstDash val="solid"/>
           </a:ln>
         </p:spPr>
+        <p:txBody>
+          <a:bodyPr/>
+          <a:p/>
+        </p:txBody>
       </p:sp>
       <p:sp>
         <p:nvSpPr>
@@ -4471,6 +4507,10 @@
             <a:prstDash val="solid"/>
           </a:ln>
         </p:spPr>
+        <p:txBody>
+          <a:bodyPr/>
+          <a:p/>
+        </p:txBody>
       </p:sp>
       <p:sp>
         <p:nvSpPr>
@@ -4496,6 +4536,10 @@
             <a:prstDash val="solid"/>
           </a:ln>
         </p:spPr>
+        <p:txBody>
+          <a:bodyPr/>
+          <a:p/>
+        </p:txBody>
       </p:sp>
       <p:sp>
         <p:nvSpPr>
@@ -4694,6 +4738,10 @@
             <a:prstDash val="solid"/>
           </a:ln>
         </p:spPr>
+        <p:txBody>
+          <a:bodyPr/>
+          <a:p/>
+        </p:txBody>
       </p:sp>
       <p:sp>
         <p:nvSpPr>
@@ -4719,6 +4767,10 @@
             <a:prstDash val="solid"/>
           </a:ln>
         </p:spPr>
+        <p:txBody>
+          <a:bodyPr/>
+          <a:p/>
+        </p:txBody>
       </p:sp>
       <p:sp>
         <p:nvSpPr>
@@ -4744,6 +4796,10 @@
             <a:prstDash val="solid"/>
           </a:ln>
         </p:spPr>
+        <p:txBody>
+          <a:bodyPr/>
+          <a:p/>
+        </p:txBody>
       </p:sp>
       <p:sp>
         <p:nvSpPr>
@@ -4942,6 +4998,10 @@
             <a:prstDash val="solid"/>
           </a:ln>
         </p:spPr>
+        <p:txBody>
+          <a:bodyPr/>
+          <a:p/>
+        </p:txBody>
       </p:sp>
       <p:sp>
         <p:nvSpPr>
@@ -5050,6 +5110,10 @@
             <a:prstDash val="solid"/>
           </a:ln>
         </p:spPr>
+        <p:txBody>
+          <a:bodyPr/>
+          <a:p/>
+        </p:txBody>
       </p:sp>
       <p:sp>
         <p:nvSpPr>
@@ -5114,6 +5178,10 @@
             <a:prstDash val="solid"/>
           </a:ln>
         </p:spPr>
+        <p:txBody>
+          <a:bodyPr/>
+          <a:p/>
+        </p:txBody>
       </p:sp>
       <p:sp>
         <p:nvSpPr>
@@ -5178,6 +5246,10 @@
             <a:prstDash val="solid"/>
           </a:ln>
         </p:spPr>
+        <p:txBody>
+          <a:bodyPr/>
+          <a:p/>
+        </p:txBody>
       </p:sp>
       <p:sp>
         <p:nvSpPr>
@@ -5242,6 +5314,10 @@
             <a:prstDash val="solid"/>
           </a:ln>
         </p:spPr>
+        <p:txBody>
+          <a:bodyPr/>
+          <a:p/>
+        </p:txBody>
       </p:sp>
       <p:sp>
         <p:nvSpPr>
@@ -5306,6 +5382,10 @@
             <a:prstDash val="solid"/>
           </a:ln>
         </p:spPr>
+        <p:txBody>
+          <a:bodyPr/>
+          <a:p/>
+        </p:txBody>
       </p:sp>
       <p:sp>
         <p:nvSpPr>
@@ -5370,6 +5450,10 @@
             <a:prstDash val="solid"/>
           </a:ln>
         </p:spPr>
+        <p:txBody>
+          <a:bodyPr/>
+          <a:p/>
+        </p:txBody>
       </p:sp>
       <p:sp>
         <p:nvSpPr>
@@ -5471,6 +5555,10 @@
             <a:prstDash val="solid"/>
           </a:ln>
         </p:spPr>
+        <p:txBody>
+          <a:bodyPr/>
+          <a:p/>
+        </p:txBody>
       </p:sp>
       <p:sp>
         <p:nvSpPr>
@@ -5705,6 +5793,10 @@
             <a:prstDash val="solid"/>
           </a:ln>
         </p:spPr>
+        <p:txBody>
+          <a:bodyPr/>
+          <a:p/>
+        </p:txBody>
       </p:sp>
       <p:sp>
         <p:nvSpPr>
@@ -5806,6 +5898,10 @@
             <a:prstDash val="solid"/>
           </a:ln>
         </p:spPr>
+        <p:txBody>
+          <a:bodyPr/>
+          <a:p/>
+        </p:txBody>
       </p:sp>
       <p:sp>
         <p:nvSpPr>
@@ -5907,6 +6003,10 @@
             <a:prstDash val="solid"/>
           </a:ln>
         </p:spPr>
+        <p:txBody>
+          <a:bodyPr/>
+          <a:p/>
+        </p:txBody>
       </p:sp>
       <p:sp>
         <p:nvSpPr>
@@ -6043,6 +6143,10 @@
             <a:prstDash val="solid"/>
           </a:ln>
         </p:spPr>
+        <p:txBody>
+          <a:bodyPr/>
+          <a:p/>
+        </p:txBody>
       </p:sp>
       <p:sp>
         <p:nvSpPr>
@@ -6107,6 +6211,10 @@
             <a:prstDash val="solid"/>
           </a:ln>
         </p:spPr>
+        <p:txBody>
+          <a:bodyPr/>
+          <a:p/>
+        </p:txBody>
       </p:sp>
       <p:sp>
         <p:nvSpPr>
@@ -6171,6 +6279,10 @@
             <a:prstDash val="solid"/>
           </a:ln>
         </p:spPr>
+        <p:txBody>
+          <a:bodyPr/>
+          <a:p/>
+        </p:txBody>
       </p:sp>
       <p:sp>
         <p:nvSpPr>
@@ -6235,6 +6347,10 @@
             <a:prstDash val="solid"/>
           </a:ln>
         </p:spPr>
+        <p:txBody>
+          <a:bodyPr/>
+          <a:p/>
+        </p:txBody>
       </p:sp>
       <p:sp>
         <p:nvSpPr>
@@ -6299,6 +6415,10 @@
             <a:prstDash val="solid"/>
           </a:ln>
         </p:spPr>
+        <p:txBody>
+          <a:bodyPr/>
+          <a:p/>
+        </p:txBody>
       </p:sp>
       <p:sp>
         <p:nvSpPr>
@@ -6363,6 +6483,10 @@
             <a:prstDash val="solid"/>
           </a:ln>
         </p:spPr>
+        <p:txBody>
+          <a:bodyPr/>
+          <a:p/>
+        </p:txBody>
       </p:sp>
       <p:sp>
         <p:nvSpPr>
@@ -6464,6 +6588,10 @@
             <a:prstDash val="solid"/>
           </a:ln>
         </p:spPr>
+        <p:txBody>
+          <a:bodyPr/>
+          <a:p/>
+        </p:txBody>
       </p:sp>
       <p:sp>
         <p:nvSpPr>
@@ -6831,6 +6959,10 @@
             <a:prstDash val="solid"/>
           </a:ln>
         </p:spPr>
+        <p:txBody>
+          <a:bodyPr/>
+          <a:p/>
+        </p:txBody>
       </p:sp>
       <p:sp>
         <p:nvSpPr>
@@ -6932,6 +7064,10 @@
             <a:prstDash val="solid"/>
           </a:ln>
         </p:spPr>
+        <p:txBody>
+          <a:bodyPr/>
+          <a:p/>
+        </p:txBody>
       </p:sp>
       <p:sp>
         <p:nvSpPr>
@@ -7035,6 +7171,10 @@
             <a:prstDash val="solid"/>
           </a:ln>
         </p:spPr>
+        <p:txBody>
+          <a:bodyPr/>
+          <a:p/>
+        </p:txBody>
       </p:sp>
       <p:sp>
         <p:nvSpPr>
@@ -7132,6 +7272,10 @@
             <a:prstDash val="solid"/>
           </a:ln>
         </p:spPr>
+        <p:txBody>
+          <a:bodyPr/>
+          <a:p/>
+        </p:txBody>
       </p:sp>
       <p:sp>
         <p:nvSpPr>
@@ -7196,6 +7340,10 @@
             <a:prstDash val="solid"/>
           </a:ln>
         </p:spPr>
+        <p:txBody>
+          <a:bodyPr/>
+          <a:p/>
+        </p:txBody>
       </p:sp>
       <p:sp>
         <p:nvSpPr>
@@ -7260,6 +7408,10 @@
             <a:prstDash val="solid"/>
           </a:ln>
         </p:spPr>
+        <p:txBody>
+          <a:bodyPr/>
+          <a:p/>
+        </p:txBody>
       </p:sp>
       <p:sp>
         <p:nvSpPr>
@@ -7324,6 +7476,10 @@
             <a:prstDash val="solid"/>
           </a:ln>
         </p:spPr>
+        <p:txBody>
+          <a:bodyPr/>
+          <a:p/>
+        </p:txBody>
       </p:sp>
       <p:sp>
         <p:nvSpPr>
@@ -7388,6 +7544,10 @@
             <a:prstDash val="solid"/>
           </a:ln>
         </p:spPr>
+        <p:txBody>
+          <a:bodyPr/>
+          <a:p/>
+        </p:txBody>
       </p:sp>
       <p:sp>
         <p:nvSpPr>
@@ -7452,6 +7612,10 @@
             <a:prstDash val="solid"/>
           </a:ln>
         </p:spPr>
+        <p:txBody>
+          <a:bodyPr/>
+          <a:p/>
+        </p:txBody>
       </p:sp>
       <p:sp>
         <p:nvSpPr>
@@ -7553,6 +7717,10 @@
             <a:prstDash val="solid"/>
           </a:ln>
         </p:spPr>
+        <p:txBody>
+          <a:bodyPr/>
+          <a:p/>
+        </p:txBody>
       </p:sp>
       <p:sp>
         <p:nvSpPr>
@@ -7587,7 +7755,7 @@
                 <a:ea typeface="Arial" pitchFamily="34" charset="-122"/>
                 <a:cs typeface="Arial" pitchFamily="34" charset="-120"/>
               </a:rPr>
-              <a:t>Source: player telemetry. 60-day IAP value per install, Jan–Feb installs. Channels: 30-day value, Jan–Mar installs, matched to the same country-tier mix; stratified player bootstrap (5,000 draws), Holm-adjusted across 3 comparisons.</a:t>
+              <a:t>Source: player telemetry. 60-day IAP value per install, Jan–Feb installs. Channels: 30-day value, Jan–Mar installs, matched to the same country-tier mix; stratified player bootstrap (5,000 draws).</a:t>
             </a:r>
             <a:endParaRPr lang="en-US" sz="850" dirty="0"/>
           </a:p>
@@ -7711,6 +7879,10 @@
             <a:prstDash val="solid"/>
           </a:ln>
         </p:spPr>
+        <p:txBody>
+          <a:bodyPr/>
+          <a:p/>
+        </p:txBody>
       </p:sp>
       <p:sp>
         <p:nvSpPr>
@@ -7853,6 +8025,10 @@
             <a:prstDash val="solid"/>
           </a:ln>
         </p:spPr>
+        <p:txBody>
+          <a:bodyPr/>
+          <a:p/>
+        </p:txBody>
       </p:sp>
       <p:sp>
         <p:nvSpPr>
@@ -7956,6 +8132,10 @@
             <a:prstDash val="solid"/>
           </a:ln>
         </p:spPr>
+        <p:txBody>
+          <a:bodyPr/>
+          <a:p/>
+        </p:txBody>
       </p:sp>
       <p:sp>
         <p:nvSpPr>
@@ -8059,6 +8239,10 @@
             <a:prstDash val="solid"/>
           </a:ln>
         </p:spPr>
+        <p:txBody>
+          <a:bodyPr/>
+          <a:p/>
+        </p:txBody>
       </p:sp>
       <p:sp>
         <p:nvSpPr>
@@ -8162,6 +8346,10 @@
             <a:prstDash val="solid"/>
           </a:ln>
         </p:spPr>
+        <p:txBody>
+          <a:bodyPr/>
+          <a:p/>
+        </p:txBody>
       </p:sp>
       <p:sp>
         <p:nvSpPr>
@@ -8337,6 +8525,10 @@
             <a:prstDash val="solid"/>
           </a:ln>
         </p:spPr>
+        <p:txBody>
+          <a:bodyPr/>
+          <a:p/>
+        </p:txBody>
       </p:sp>
       <p:sp>
         <p:nvSpPr>
@@ -8401,6 +8593,10 @@
             <a:prstDash val="solid"/>
           </a:ln>
         </p:spPr>
+        <p:txBody>
+          <a:bodyPr/>
+          <a:p/>
+        </p:txBody>
       </p:sp>
       <p:sp>
         <p:nvSpPr>
@@ -8465,6 +8661,10 @@
             <a:prstDash val="solid"/>
           </a:ln>
         </p:spPr>
+        <p:txBody>
+          <a:bodyPr/>
+          <a:p/>
+        </p:txBody>
       </p:sp>
       <p:sp>
         <p:nvSpPr>
@@ -8529,6 +8729,10 @@
             <a:prstDash val="solid"/>
           </a:ln>
         </p:spPr>
+        <p:txBody>
+          <a:bodyPr/>
+          <a:p/>
+        </p:txBody>
       </p:sp>
       <p:sp>
         <p:nvSpPr>
@@ -8593,6 +8797,10 @@
             <a:prstDash val="solid"/>
           </a:ln>
         </p:spPr>
+        <p:txBody>
+          <a:bodyPr/>
+          <a:p/>
+        </p:txBody>
       </p:sp>
       <p:sp>
         <p:nvSpPr>
@@ -8657,6 +8865,10 @@
             <a:prstDash val="solid"/>
           </a:ln>
         </p:spPr>
+        <p:txBody>
+          <a:bodyPr/>
+          <a:p/>
+        </p:txBody>
       </p:sp>
       <p:sp>
         <p:nvSpPr>
@@ -8758,6 +8970,10 @@
             <a:prstDash val="solid"/>
           </a:ln>
         </p:spPr>
+        <p:txBody>
+          <a:bodyPr/>
+          <a:p/>
+        </p:txBody>
       </p:sp>
       <p:sp>
         <p:nvSpPr>
@@ -8861,6 +9077,10 @@
             <a:prstDash val="solid"/>
           </a:ln>
         </p:spPr>
+        <p:txBody>
+          <a:bodyPr/>
+          <a:p/>
+        </p:txBody>
       </p:sp>
       <p:sp>
         <p:nvSpPr>
@@ -8886,6 +9106,10 @@
             <a:prstDash val="solid"/>
           </a:ln>
         </p:spPr>
+        <p:txBody>
+          <a:bodyPr/>
+          <a:p/>
+        </p:txBody>
       </p:sp>
       <p:sp>
         <p:nvSpPr>
@@ -9028,6 +9252,10 @@
             <a:prstDash val="solid"/>
           </a:ln>
         </p:spPr>
+        <p:txBody>
+          <a:bodyPr/>
+          <a:p/>
+        </p:txBody>
       </p:sp>
       <p:sp>
         <p:nvSpPr>
@@ -9053,6 +9281,10 @@
             <a:prstDash val="solid"/>
           </a:ln>
         </p:spPr>
+        <p:txBody>
+          <a:bodyPr/>
+          <a:p/>
+        </p:txBody>
       </p:sp>
       <p:sp>
         <p:nvSpPr>
@@ -9195,6 +9427,10 @@
             <a:prstDash val="solid"/>
           </a:ln>
         </p:spPr>
+        <p:txBody>
+          <a:bodyPr/>
+          <a:p/>
+        </p:txBody>
       </p:sp>
       <p:sp>
         <p:nvSpPr>
@@ -9220,6 +9456,10 @@
             <a:prstDash val="solid"/>
           </a:ln>
         </p:spPr>
+        <p:txBody>
+          <a:bodyPr/>
+          <a:p/>
+        </p:txBody>
       </p:sp>
       <p:sp>
         <p:nvSpPr>
@@ -9362,6 +9602,10 @@
             <a:prstDash val="solid"/>
           </a:ln>
         </p:spPr>
+        <p:txBody>
+          <a:bodyPr/>
+          <a:p/>
+        </p:txBody>
       </p:sp>
       <p:sp>
         <p:nvSpPr>
@@ -9387,6 +9631,10 @@
             <a:prstDash val="solid"/>
           </a:ln>
         </p:spPr>
+        <p:txBody>
+          <a:bodyPr/>
+          <a:p/>
+        </p:txBody>
       </p:sp>
       <p:sp>
         <p:nvSpPr>
@@ -9529,6 +9777,10 @@
             <a:prstDash val="solid"/>
           </a:ln>
         </p:spPr>
+        <p:txBody>
+          <a:bodyPr/>
+          <a:p/>
+        </p:txBody>
       </p:sp>
       <p:sp>
         <p:nvSpPr>
@@ -9554,6 +9806,10 @@
             <a:prstDash val="solid"/>
           </a:ln>
         </p:spPr>
+        <p:txBody>
+          <a:bodyPr/>
+          <a:p/>
+        </p:txBody>
       </p:sp>
       <p:sp>
         <p:nvSpPr>
@@ -9696,6 +9952,10 @@
             <a:prstDash val="solid"/>
           </a:ln>
         </p:spPr>
+        <p:txBody>
+          <a:bodyPr/>
+          <a:p/>
+        </p:txBody>
       </p:sp>
       <p:sp>
         <p:nvSpPr>
@@ -9721,6 +9981,10 @@
             <a:prstDash val="solid"/>
           </a:ln>
         </p:spPr>
+        <p:txBody>
+          <a:bodyPr/>
+          <a:p/>
+        </p:txBody>
       </p:sp>
       <p:sp>
         <p:nvSpPr>
@@ -9896,6 +10160,10 @@
             <a:prstDash val="solid"/>
           </a:ln>
         </p:spPr>
+        <p:txBody>
+          <a:bodyPr/>
+          <a:p/>
+        </p:txBody>
       </p:sp>
       <p:sp>
         <p:nvSpPr>
@@ -9960,6 +10228,10 @@
             <a:prstDash val="solid"/>
           </a:ln>
         </p:spPr>
+        <p:txBody>
+          <a:bodyPr/>
+          <a:p/>
+        </p:txBody>
       </p:sp>
       <p:sp>
         <p:nvSpPr>
@@ -10024,6 +10296,10 @@
             <a:prstDash val="solid"/>
           </a:ln>
         </p:spPr>
+        <p:txBody>
+          <a:bodyPr/>
+          <a:p/>
+        </p:txBody>
       </p:sp>
       <p:sp>
         <p:nvSpPr>
@@ -10088,6 +10364,10 @@
             <a:prstDash val="solid"/>
           </a:ln>
         </p:spPr>
+        <p:txBody>
+          <a:bodyPr/>
+          <a:p/>
+        </p:txBody>
       </p:sp>
       <p:sp>
         <p:nvSpPr>
@@ -10152,6 +10432,10 @@
             <a:prstDash val="solid"/>
           </a:ln>
         </p:spPr>
+        <p:txBody>
+          <a:bodyPr/>
+          <a:p/>
+        </p:txBody>
       </p:sp>
       <p:sp>
         <p:nvSpPr>
@@ -10216,6 +10500,10 @@
             <a:prstDash val="solid"/>
           </a:ln>
         </p:spPr>
+        <p:txBody>
+          <a:bodyPr/>
+          <a:p/>
+        </p:txBody>
       </p:sp>
       <p:sp>
         <p:nvSpPr>
@@ -10317,6 +10605,10 @@
             <a:prstDash val="solid"/>
           </a:ln>
         </p:spPr>
+        <p:txBody>
+          <a:bodyPr/>
+          <a:p/>
+        </p:txBody>
       </p:sp>
       <p:sp>
         <p:nvSpPr>
@@ -10351,7 +10643,7 @@
                 <a:ea typeface="Arial" pitchFamily="34" charset="-122"/>
                 <a:cs typeface="Arial" pitchFamily="34" charset="-120"/>
               </a:rPr>
-              <a:t>Churn: logistic regression, time-based holdout, scored on unseen April weeks; lapse = no play for 14 days. Sale effect: 7 full 15-day cycles, 8 Jan – 21 Apr. Channel CI: stratified player bootstrap.</a:t>
+              <a:t>Churn: logistic regression, time-based holdout, scored on unseen April weeks; lapse = no play for 14 days. Sale effect: 7 full 15-day cycles, 8 Jan – 22 Apr. Channel CI: stratified player bootstrap.</a:t>
             </a:r>
             <a:endParaRPr lang="en-US" sz="850" dirty="0"/>
           </a:p>
@@ -10420,6 +10712,10 @@
             <a:prstDash val="solid"/>
           </a:ln>
         </p:spPr>
+        <p:txBody>
+          <a:bodyPr/>
+          <a:p/>
+        </p:txBody>
       </p:sp>
       <p:sp>
         <p:nvSpPr>
@@ -10445,6 +10741,10 @@
             <a:prstDash val="solid"/>
           </a:ln>
         </p:spPr>
+        <p:txBody>
+          <a:bodyPr/>
+          <a:p/>
+        </p:txBody>
       </p:sp>
       <p:sp>
         <p:nvSpPr>
@@ -10624,6 +10924,10 @@
             <a:prstDash val="solid"/>
           </a:ln>
         </p:spPr>
+        <p:txBody>
+          <a:bodyPr/>
+          <a:p/>
+        </p:txBody>
       </p:sp>
       <p:sp>
         <p:nvSpPr>
@@ -10805,6 +11109,10 @@
             <a:prstDash val="solid"/>
           </a:ln>
         </p:spPr>
+        <p:txBody>
+          <a:bodyPr/>
+          <a:p/>
+        </p:txBody>
       </p:sp>
       <p:sp>
         <p:nvSpPr>
@@ -10830,6 +11138,10 @@
             <a:prstDash val="solid"/>
           </a:ln>
         </p:spPr>
+        <p:txBody>
+          <a:bodyPr/>
+          <a:p/>
+        </p:txBody>
       </p:sp>
       <p:sp>
         <p:nvSpPr>
@@ -10903,7 +11215,7 @@
                 <a:ea typeface="Arial" pitchFamily="34" charset="-122"/>
                 <a:cs typeface="Arial" pitchFamily="34" charset="-120"/>
               </a:rPr>
-              <a:t>~75%</a:t>
+              <a:t>~78%</a:t>
             </a:r>
             <a:endParaRPr lang="en-US" sz="3800" dirty="0"/>
           </a:p>
@@ -10942,7 +11254,7 @@
                 <a:ea typeface="Arial" pitchFamily="34" charset="-122"/>
                 <a:cs typeface="Arial" pitchFamily="34" charset="-120"/>
               </a:rPr>
-              <a:t>Observed: ~75% of sale-day uplift is offset by surrounding quiet days.</a:t>
+              <a:t>Observed: ~78% of sale-day uplift is offset by surrounding quiet days.</a:t>
             </a:r>
             <a:endParaRPr lang="en-US" sz="1250" dirty="0"/>
           </a:p>
@@ -10981,7 +11293,7 @@
                 <a:ea typeface="Arial" pitchFamily="34" charset="-122"/>
                 <a:cs typeface="Arial" pitchFamily="34" charset="-120"/>
               </a:rPr>
-              <a:t>Range across 7 cycles: 51–98%</a:t>
+              <a:t>Range across 7 cycles: 51–104%</a:t>
             </a:r>
             <a:endParaRPr lang="en-US" sz="1100" dirty="0"/>
           </a:p>
@@ -11009,6 +11321,10 @@
             <a:prstDash val="solid"/>
           </a:ln>
         </p:spPr>
+        <p:txBody>
+          <a:bodyPr/>
+          <a:p/>
+        </p:txBody>
       </p:sp>
       <p:sp>
         <p:nvSpPr>
@@ -11190,6 +11506,10 @@
             <a:prstDash val="solid"/>
           </a:ln>
         </p:spPr>
+        <p:txBody>
+          <a:bodyPr/>
+          <a:p/>
+        </p:txBody>
       </p:sp>
       <p:sp>
         <p:nvSpPr>
@@ -11215,6 +11535,10 @@
             <a:prstDash val="solid"/>
           </a:ln>
         </p:spPr>
+        <p:txBody>
+          <a:bodyPr/>
+          <a:p/>
+        </p:txBody>
       </p:sp>
       <p:sp>
         <p:nvSpPr>
@@ -11394,6 +11718,10 @@
             <a:prstDash val="solid"/>
           </a:ln>
         </p:spPr>
+        <p:txBody>
+          <a:bodyPr/>
+          <a:p/>
+        </p:txBody>
       </p:sp>
       <p:sp>
         <p:nvSpPr>
@@ -11598,6 +11926,10 @@
             <a:prstDash val="solid"/>
           </a:ln>
         </p:spPr>
+        <p:txBody>
+          <a:bodyPr/>
+          <a:p/>
+        </p:txBody>
       </p:sp>
       <p:sp>
         <p:nvSpPr>
@@ -11662,6 +11994,10 @@
             <a:prstDash val="solid"/>
           </a:ln>
         </p:spPr>
+        <p:txBody>
+          <a:bodyPr/>
+          <a:p/>
+        </p:txBody>
       </p:sp>
       <p:sp>
         <p:nvSpPr>
@@ -11726,6 +12062,10 @@
             <a:prstDash val="solid"/>
           </a:ln>
         </p:spPr>
+        <p:txBody>
+          <a:bodyPr/>
+          <a:p/>
+        </p:txBody>
       </p:sp>
       <p:sp>
         <p:nvSpPr>
@@ -11790,6 +12130,10 @@
             <a:prstDash val="solid"/>
           </a:ln>
         </p:spPr>
+        <p:txBody>
+          <a:bodyPr/>
+          <a:p/>
+        </p:txBody>
       </p:sp>
       <p:sp>
         <p:nvSpPr>
@@ -11854,6 +12198,10 @@
             <a:prstDash val="solid"/>
           </a:ln>
         </p:spPr>
+        <p:txBody>
+          <a:bodyPr/>
+          <a:p/>
+        </p:txBody>
       </p:sp>
       <p:sp>
         <p:nvSpPr>
@@ -11918,6 +12266,10 @@
             <a:prstDash val="solid"/>
           </a:ln>
         </p:spPr>
+        <p:txBody>
+          <a:bodyPr/>
+          <a:p/>
+        </p:txBody>
       </p:sp>
       <p:sp>
         <p:nvSpPr>
@@ -12019,6 +12371,10 @@
             <a:prstDash val="solid"/>
           </a:ln>
         </p:spPr>
+        <p:txBody>
+          <a:bodyPr/>
+          <a:p/>
+        </p:txBody>
       </p:sp>
       <p:sp>
         <p:nvSpPr>
@@ -12200,6 +12556,10 @@
             <a:prstDash val="solid"/>
           </a:ln>
         </p:spPr>
+        <p:txBody>
+          <a:bodyPr/>
+          <a:p/>
+        </p:txBody>
       </p:sp>
       <p:sp>
         <p:nvSpPr>
@@ -12225,6 +12585,10 @@
             <a:prstDash val="solid"/>
           </a:ln>
         </p:spPr>
+        <p:txBody>
+          <a:bodyPr/>
+          <a:p/>
+        </p:txBody>
       </p:sp>
       <p:sp>
         <p:nvSpPr>
@@ -12250,6 +12614,10 @@
             <a:prstDash val="solid"/>
           </a:ln>
         </p:spPr>
+        <p:txBody>
+          <a:bodyPr/>
+          <a:p/>
+        </p:txBody>
       </p:sp>
       <p:sp>
         <p:nvSpPr>
@@ -12353,6 +12721,10 @@
             <a:prstDash val="solid"/>
           </a:ln>
         </p:spPr>
+        <p:txBody>
+          <a:bodyPr/>
+          <a:p/>
+        </p:txBody>
       </p:sp>
       <p:sp>
         <p:nvSpPr>
@@ -12378,6 +12750,10 @@
             <a:prstDash val="solid"/>
           </a:ln>
         </p:spPr>
+        <p:txBody>
+          <a:bodyPr/>
+          <a:p/>
+        </p:txBody>
       </p:sp>
       <p:sp>
         <p:nvSpPr>
@@ -12403,6 +12779,10 @@
             <a:prstDash val="solid"/>
           </a:ln>
         </p:spPr>
+        <p:txBody>
+          <a:bodyPr/>
+          <a:p/>
+        </p:txBody>
       </p:sp>
       <p:sp>
         <p:nvSpPr>
@@ -12506,6 +12886,10 @@
             <a:prstDash val="solid"/>
           </a:ln>
         </p:spPr>
+        <p:txBody>
+          <a:bodyPr/>
+          <a:p/>
+        </p:txBody>
       </p:sp>
       <p:sp>
         <p:nvSpPr>
@@ -12531,6 +12915,10 @@
             <a:prstDash val="solid"/>
           </a:ln>
         </p:spPr>
+        <p:txBody>
+          <a:bodyPr/>
+          <a:p/>
+        </p:txBody>
       </p:sp>
       <p:sp>
         <p:nvSpPr>
@@ -12556,6 +12944,10 @@
             <a:prstDash val="solid"/>
           </a:ln>
         </p:spPr>
+        <p:txBody>
+          <a:bodyPr/>
+          <a:p/>
+        </p:txBody>
       </p:sp>
       <p:sp>
         <p:nvSpPr>
@@ -12659,6 +13051,10 @@
             <a:prstDash val="solid"/>
           </a:ln>
         </p:spPr>
+        <p:txBody>
+          <a:bodyPr/>
+          <a:p/>
+        </p:txBody>
       </p:sp>
       <p:sp>
         <p:nvSpPr>
@@ -12684,6 +13080,10 @@
             <a:prstDash val="solid"/>
           </a:ln>
         </p:spPr>
+        <p:txBody>
+          <a:bodyPr/>
+          <a:p/>
+        </p:txBody>
       </p:sp>
       <p:sp>
         <p:nvSpPr>
@@ -12709,6 +13109,10 @@
             <a:prstDash val="solid"/>
           </a:ln>
         </p:spPr>
+        <p:txBody>
+          <a:bodyPr/>
+          <a:p/>
+        </p:txBody>
       </p:sp>
       <p:sp>
         <p:nvSpPr>
@@ -12812,6 +13216,10 @@
             <a:prstDash val="solid"/>
           </a:ln>
         </p:spPr>
+        <p:txBody>
+          <a:bodyPr/>
+          <a:p/>
+        </p:txBody>
       </p:sp>
       <p:sp>
         <p:nvSpPr>
@@ -12837,6 +13245,10 @@
             <a:prstDash val="solid"/>
           </a:ln>
         </p:spPr>
+        <p:txBody>
+          <a:bodyPr/>
+          <a:p/>
+        </p:txBody>
       </p:sp>
       <p:sp>
         <p:nvSpPr>
@@ -12862,6 +13274,10 @@
             <a:prstDash val="solid"/>
           </a:ln>
         </p:spPr>
+        <p:txBody>
+          <a:bodyPr/>
+          <a:p/>
+        </p:txBody>
       </p:sp>
       <p:sp>
         <p:nvSpPr>
@@ -12965,6 +13381,10 @@
             <a:prstDash val="solid"/>
           </a:ln>
         </p:spPr>
+        <p:txBody>
+          <a:bodyPr/>
+          <a:p/>
+        </p:txBody>
       </p:sp>
       <p:sp>
         <p:nvSpPr>
@@ -12990,6 +13410,10 @@
             <a:prstDash val="solid"/>
           </a:ln>
         </p:spPr>
+        <p:txBody>
+          <a:bodyPr/>
+          <a:p/>
+        </p:txBody>
       </p:sp>
       <p:sp>
         <p:nvSpPr>
@@ -13015,6 +13439,10 @@
             <a:prstDash val="solid"/>
           </a:ln>
         </p:spPr>
+        <p:txBody>
+          <a:bodyPr/>
+          <a:p/>
+        </p:txBody>
       </p:sp>
       <p:sp>
         <p:nvSpPr>
@@ -13118,6 +13546,10 @@
             <a:prstDash val="solid"/>
           </a:ln>
         </p:spPr>
+        <p:txBody>
+          <a:bodyPr/>
+          <a:p/>
+        </p:txBody>
       </p:sp>
       <p:sp>
         <p:nvSpPr>
@@ -13260,6 +13692,10 @@
             <a:prstDash val="solid"/>
           </a:ln>
         </p:spPr>
+        <p:txBody>
+          <a:bodyPr/>
+          <a:p/>
+        </p:txBody>
       </p:sp>
       <p:sp>
         <p:nvSpPr>
@@ -13402,6 +13838,10 @@
             <a:prstDash val="solid"/>
           </a:ln>
         </p:spPr>
+        <p:txBody>
+          <a:bodyPr/>
+          <a:p/>
+        </p:txBody>
       </p:sp>
       <p:sp>
         <p:nvSpPr>
@@ -13544,6 +13984,10 @@
             <a:prstDash val="solid"/>
           </a:ln>
         </p:spPr>
+        <p:txBody>
+          <a:bodyPr/>
+          <a:p/>
+        </p:txBody>
       </p:sp>
       <p:sp>
         <p:nvSpPr>
@@ -13686,6 +14130,10 @@
             <a:prstDash val="solid"/>
           </a:ln>
         </p:spPr>
+        <p:txBody>
+          <a:bodyPr/>
+          <a:p/>
+        </p:txBody>
       </p:sp>
       <p:sp>
         <p:nvSpPr>
@@ -13828,6 +14276,10 @@
             <a:prstDash val="solid"/>
           </a:ln>
         </p:spPr>
+        <p:txBody>
+          <a:bodyPr/>
+          <a:p/>
+        </p:txBody>
       </p:sp>
       <p:sp>
         <p:nvSpPr>
